--- a/public/fun/pack/pptx/familypro/가족소개프리미엄_50_반려동물과함께_골든레드.pptx
+++ b/public/fun/pack/pptx/familypro/가족소개프리미엄_50_반려동물과함께_골든레드.pptx
@@ -113,12 +113,12 @@
   <p:extLst>
     <p:ext uri="{521415D9-36F7-43E2-AB2F-B90AF26B5E84}">
       <p14:sectionLst xmlns:p14="http://schemas.microsoft.com/office/powerpoint/2010/main">
-        <p14:section name="시작" id="{60AEDFF1-FD7D-4E6B-B4E5-081338D30BEC}">
+        <p14:section name="시작" id="{F5594FF6-69F0-4D52-A0BF-0CAA13758E47}">
           <p14:sldIdLst>
             <p14:sldId id="256"/>
           </p14:sldIdLst>
         </p14:section>
-        <p14:section name="본문" id="{660C8827-CDE9-43FB-9095-0E521B50CB9C}">
+        <p14:section name="본문" id="{F1DC74A5-B4DA-4677-9B5D-76757EE52DB8}">
           <p14:sldIdLst>
             <p14:sldId id="257"/>
             <p14:sldId id="258"/>
@@ -127,7 +127,7 @@
             <p14:sldId id="261"/>
           </p14:sldIdLst>
         </p14:section>
-        <p14:section name="마무리" id="{738EA763-81EB-4FA6-AF37-AD79451D5C15}">
+        <p14:section name="마무리" id="{13910560-B53E-4084-930D-AFB043674745}">
           <p14:sldIdLst>
             <p14:sldId id="262"/>
           </p14:sldIdLst>
@@ -1520,7 +1520,7 @@
             </a:lvl1pPr>
           </a:lstStyle>
           <a:p>
-            <a:fld id="{87B9D852-A679-41A5-97B9-FDEDECBF772A}" type="slidenum">
+            <a:fld id="{18452437-B7EA-4358-8D61-0DF9C69D101D}" type="slidenum">
               <a:rPr lang="en-US"/>
               <a:t>‹#›</a:t>
             </a:fld>
@@ -2521,7 +2521,7 @@
             </a:lvl1pPr>
           </a:lstStyle>
           <a:p>
-            <a:fld id="{82CADF31-04CD-4B34-BAEE-5B34A1D4F2EE}" type="slidenum">
+            <a:fld id="{713C20BA-F7DF-4914-8122-49EC0BF8F2FD}" type="slidenum">
               <a:rPr lang="en-US"/>
               <a:t>‹#›</a:t>
             </a:fld>
@@ -3523,7 +3523,7 @@
             </a:lvl1pPr>
           </a:lstStyle>
           <a:p>
-            <a:fld id="{E91F4508-5278-4594-9BBC-F51A1115A407}" type="slidenum">
+            <a:fld id="{5221205C-39E0-4ACC-BAC2-DFC4D8BFEFF6}" type="slidenum">
               <a:rPr lang="en-US"/>
               <a:t>‹#›</a:t>
             </a:fld>
@@ -4664,7 +4664,7 @@
           <a:p>
             <a:r>
               <a:rPr lang="ko-KR"/>
-              <a:t>새해 해돋이 보러 같이 올라간 산</a:t>
+              <a:t>해돋이 보러 같이 올라간 산</a:t>
             </a:r>
           </a:p>
         </p:txBody>
@@ -4686,7 +4686,7 @@
           <a:p>
             <a:r>
               <a:rPr lang="ko-KR"/>
-              <a:t>반려동물과 함께 · 0000. 00. 00</a:t>
+              <a:t>반려동물과 함께 · 날짜 입력</a:t>
             </a:r>
           </a:p>
         </p:txBody>
@@ -4975,7 +4975,7 @@
           <a:bodyPr/>
           <a:lstStyle/>
           <a:p>
-            <a:fld id="{2A0D9CBE-BACB-419D-8104-DDDC8DB4CC00}" type="slidenum">
+            <a:fld id="{6804EA52-44E6-429D-A786-65EC787F5A68}" type="slidenum">
               <a:rPr lang="en-US"/>
               <a:t>‹#›</a:t>
             </a:fld>
@@ -5531,7 +5531,7 @@
           <a:bodyPr/>
           <a:lstStyle/>
           <a:p>
-            <a:fld id="{05975257-AEAE-44A5-BE40-D000322EA53A}" type="slidenum">
+            <a:fld id="{B08A6088-C900-4443-81A8-E014950591ED}" type="slidenum">
               <a:rPr lang="en-US"/>
               <a:t>‹#›</a:t>
             </a:fld>
@@ -6506,7 +6506,7 @@
           <a:bodyPr/>
           <a:lstStyle/>
           <a:p>
-            <a:fld id="{87F382C0-FCC2-4CFF-8C4C-7E6591F75671}" type="slidenum">
+            <a:fld id="{2C7C358F-5A30-4F03-983C-7B42CE5633A5}" type="slidenum">
               <a:rPr lang="en-US"/>
               <a:t>‹#›</a:t>
             </a:fld>
@@ -7791,7 +7791,7 @@
           <a:bodyPr/>
           <a:lstStyle/>
           <a:p>
-            <a:fld id="{018D78E7-B654-4B2F-895B-7C299385DFFD}" type="slidenum">
+            <a:fld id="{EFABB93E-FC11-49E0-854F-DDBB544EF951}" type="slidenum">
               <a:rPr lang="en-US"/>
               <a:t>‹#›</a:t>
             </a:fld>
@@ -7879,7 +7879,7 @@
           <a:bodyPr/>
           <a:lstStyle/>
           <a:p>
-            <a:fld id="{490B2E0E-C54D-49D8-A194-2231EB8B97B4}" type="slidenum">
+            <a:fld id="{EC67AF1B-CB18-4609-BADD-B76BAB72F10D}" type="slidenum">
               <a:rPr lang="en-US"/>
               <a:t>‹#›</a:t>
             </a:fld>
